--- a/templates/SIG组申报模板 v0.2.pptx
+++ b/templates/SIG组申报模板 v0.2.pptx
@@ -121,15 +121,6 @@
 <p:cmAuthorLst xmlns:a="http://schemas.openxmlformats.org/drawingml/2006/main" xmlns:r="http://schemas.openxmlformats.org/officeDocument/2006/relationships" xmlns:p="http://schemas.openxmlformats.org/presentationml/2006/main">
   <p:cmAuthor id="2000" name="zhunaipan 00584191_uQbeZF3a" initials="authorId_AK20210901JXNSXO549653" lastIdx="0" clrIdx="0"/>
 </p:cmAuthorLst>
-</file>
-
-<file path=ppt/comments/comment1.xml><?xml version="1.0" encoding="utf-8"?>
-<p:cmLst xmlns:a="http://schemas.openxmlformats.org/drawingml/2006/main" xmlns:r="http://schemas.openxmlformats.org/officeDocument/2006/relationships" xmlns:p="http://schemas.openxmlformats.org/presentationml/2006/main">
-  <p:cm authorId="2000" dt="2026-01-28T15:40:21.000" idx="1099862241">
-    <p:pos x="216" y="751"/>
-    <p:text>这一页看标题是SIG组结构，是不是重点就将SIG组结构，仓库相关是不是再起一页</p:text>
-  </p:cm>
-</p:cmLst>
 </file>
 
 <file path=ppt/slideLayouts/slideLayout1.xml><?xml version="1.0" encoding="utf-8"?>
@@ -6519,7 +6510,7 @@
                 <a:latin typeface="微软雅黑" panose="020B0503020204020204" pitchFamily="34" charset="-122"/>
                 <a:ea typeface="微软雅黑" panose="020B0503020204020204" pitchFamily="34" charset="-122"/>
               </a:rPr>
-              <a:t> 仓介绍</a:t>
+              <a:t> 代码仓介绍</a:t>
             </a:r>
             <a:endParaRPr lang="zh-CN" altLang="en-US" sz="2400" b="1" dirty="0">
               <a:solidFill>
@@ -6592,9 +6583,10 @@
                 <a:tableStyleId>{5940675A-B579-460E-94D1-54222C63F5DA}</a:tableStyleId>
               </a:tblPr>
               <a:tblGrid>
-                <a:gridCol w="2140585"/>
-                <a:gridCol w="2012950"/>
-                <a:gridCol w="6897370"/>
+                <a:gridCol w="1317976"/>
+                <a:gridCol w="1239391"/>
+                <a:gridCol w="6694805"/>
+                <a:gridCol w="1798733"/>
               </a:tblGrid>
               <a:tr h="483235">
                 <a:tc>
@@ -6748,6 +6740,55 @@
                     </a:lnB>
                   </a:tcPr>
                 </a:tc>
+                <a:tc>
+                  <a:txBody>
+                    <a:bodyPr/>
+                    <a:p>
+                      <a:pPr algn="ctr">
+                        <a:buNone/>
+                      </a:pPr>
+                      <a:r>
+                        <a:rPr lang="en-US" altLang="zh-CN" sz="1200"/>
+                        <a:t>LICENSE</a:t>
+                      </a:r>
+                      <a:endParaRPr lang="en-US" altLang="zh-CN" sz="1200"/>
+                    </a:p>
+                  </a:txBody>
+                  <a:tcPr anchor="ctr">
+                    <a:lnL w="12700" cmpd="sng">
+                      <a:solidFill>
+                        <a:srgbClr val="000000">
+                          <a:alpha val="100000"/>
+                        </a:srgbClr>
+                      </a:solidFill>
+                      <a:prstDash val="solid"/>
+                    </a:lnL>
+                    <a:lnR w="12700" cmpd="sng">
+                      <a:solidFill>
+                        <a:srgbClr val="000000">
+                          <a:alpha val="100000"/>
+                        </a:srgbClr>
+                      </a:solidFill>
+                      <a:prstDash val="solid"/>
+                    </a:lnR>
+                    <a:lnT w="12700" cmpd="sng">
+                      <a:solidFill>
+                        <a:srgbClr val="000000">
+                          <a:alpha val="100000"/>
+                        </a:srgbClr>
+                      </a:solidFill>
+                      <a:prstDash val="solid"/>
+                    </a:lnT>
+                    <a:lnB w="12700" cmpd="sng">
+                      <a:solidFill>
+                        <a:srgbClr val="000000">
+                          <a:alpha val="100000"/>
+                        </a:srgbClr>
+                      </a:solidFill>
+                      <a:prstDash val="solid"/>
+                    </a:lnB>
+                  </a:tcPr>
+                </a:tc>
               </a:tr>
               <a:tr h="403225">
                 <a:tc>
@@ -6885,8 +6926,98 @@
                     </a:lnB>
                   </a:tcPr>
                 </a:tc>
+                <a:tc>
+                  <a:txBody>
+                    <a:bodyPr/>
+                    <a:p>
+                      <a:pPr algn="ctr">
+                        <a:buNone/>
+                      </a:pPr>
+                      <a:endParaRPr lang="zh-CN" altLang="en-US"/>
+                    </a:p>
+                  </a:txBody>
+                  <a:tcPr anchor="ctr">
+                    <a:lnL w="12700" cmpd="sng">
+                      <a:solidFill>
+                        <a:srgbClr val="000000">
+                          <a:alpha val="100000"/>
+                        </a:srgbClr>
+                      </a:solidFill>
+                      <a:prstDash val="solid"/>
+                    </a:lnL>
+                    <a:lnR w="12700" cmpd="sng">
+                      <a:solidFill>
+                        <a:srgbClr val="000000">
+                          <a:alpha val="100000"/>
+                        </a:srgbClr>
+                      </a:solidFill>
+                      <a:prstDash val="solid"/>
+                    </a:lnR>
+                    <a:lnT w="12700" cmpd="sng">
+                      <a:solidFill>
+                        <a:srgbClr val="000000">
+                          <a:alpha val="100000"/>
+                        </a:srgbClr>
+                      </a:solidFill>
+                      <a:prstDash val="solid"/>
+                    </a:lnT>
+                    <a:lnB w="12700" cmpd="sng">
+                      <a:solidFill>
+                        <a:srgbClr val="000000">
+                          <a:alpha val="100000"/>
+                        </a:srgbClr>
+                      </a:solidFill>
+                      <a:prstDash val="solid"/>
+                    </a:lnB>
+                  </a:tcPr>
+                </a:tc>
               </a:tr>
               <a:tr h="403225">
+                <a:tc>
+                  <a:txBody>
+                    <a:bodyPr/>
+                    <a:p>
+                      <a:pPr algn="ctr">
+                        <a:buNone/>
+                      </a:pPr>
+                      <a:endParaRPr lang="zh-CN" altLang="en-US"/>
+                    </a:p>
+                  </a:txBody>
+                  <a:tcPr anchor="ctr">
+                    <a:lnL w="12700" cmpd="sng">
+                      <a:solidFill>
+                        <a:srgbClr val="000000">
+                          <a:alpha val="100000"/>
+                        </a:srgbClr>
+                      </a:solidFill>
+                      <a:prstDash val="solid"/>
+                    </a:lnL>
+                    <a:lnR w="12700" cmpd="sng">
+                      <a:solidFill>
+                        <a:srgbClr val="000000">
+                          <a:alpha val="100000"/>
+                        </a:srgbClr>
+                      </a:solidFill>
+                      <a:prstDash val="solid"/>
+                    </a:lnR>
+                    <a:lnT w="12700" cmpd="sng">
+                      <a:solidFill>
+                        <a:srgbClr val="000000">
+                          <a:alpha val="100000"/>
+                        </a:srgbClr>
+                      </a:solidFill>
+                      <a:prstDash val="solid"/>
+                    </a:lnT>
+                    <a:lnB w="12700" cmpd="sng">
+                      <a:solidFill>
+                        <a:srgbClr val="000000">
+                          <a:alpha val="100000"/>
+                        </a:srgbClr>
+                      </a:solidFill>
+                      <a:prstDash val="solid"/>
+                    </a:lnB>
+                  </a:tcPr>
+                </a:tc>
                 <a:tc>
                   <a:txBody>
                     <a:bodyPr/>
@@ -8203,9 +8334,9 @@
                             <a:schemeClr val="tx1"/>
                           </a:solidFill>
                         </a:rPr>
-                        <a:t>License</a:t>
+                        <a:t>LICENSE</a:t>
                       </a:r>
-                      <a:endParaRPr lang="zh-CN" altLang="en-US" dirty="0">
+                      <a:endParaRPr lang="en-US" altLang="zh-CN" dirty="0">
                         <a:solidFill>
                           <a:schemeClr val="tx1"/>
                         </a:solidFill>
